--- a/1-Alterar para BRIDGE.pptx
+++ b/1-Alterar para BRIDGE.pptx
@@ -107,6 +107,11 @@
       </a:defRPr>
     </a:lvl9pPr>
   </p:defaultTextStyle>
+  <p:extLst>
+    <p:ext uri="{EFAFB233-063F-42B5-8137-9DF3F51BA10A}">
+      <p15:sldGuideLst xmlns:p15="http://schemas.microsoft.com/office/powerpoint/2012/main"/>
+    </p:ext>
+  </p:extLst>
 </p:presentation>
 </file>
 
@@ -257,7 +262,7 @@
           <a:p>
             <a:fld id="{15FCE9AC-568D-47EF-8D4F-8498CE769F09}" type="datetimeFigureOut">
               <a:rPr lang="pt-BR" smtClean="0"/>
-              <a:t>07/04/2025</a:t>
+              <a:t>08/04/2025</a:t>
             </a:fld>
             <a:endParaRPr lang="pt-BR"/>
           </a:p>
@@ -455,7 +460,7 @@
           <a:p>
             <a:fld id="{15FCE9AC-568D-47EF-8D4F-8498CE769F09}" type="datetimeFigureOut">
               <a:rPr lang="pt-BR" smtClean="0"/>
-              <a:t>07/04/2025</a:t>
+              <a:t>08/04/2025</a:t>
             </a:fld>
             <a:endParaRPr lang="pt-BR"/>
           </a:p>
@@ -663,7 +668,7 @@
           <a:p>
             <a:fld id="{15FCE9AC-568D-47EF-8D4F-8498CE769F09}" type="datetimeFigureOut">
               <a:rPr lang="pt-BR" smtClean="0"/>
-              <a:t>07/04/2025</a:t>
+              <a:t>08/04/2025</a:t>
             </a:fld>
             <a:endParaRPr lang="pt-BR"/>
           </a:p>
@@ -861,7 +866,7 @@
           <a:p>
             <a:fld id="{15FCE9AC-568D-47EF-8D4F-8498CE769F09}" type="datetimeFigureOut">
               <a:rPr lang="pt-BR" smtClean="0"/>
-              <a:t>07/04/2025</a:t>
+              <a:t>08/04/2025</a:t>
             </a:fld>
             <a:endParaRPr lang="pt-BR"/>
           </a:p>
@@ -1136,7 +1141,7 @@
           <a:p>
             <a:fld id="{15FCE9AC-568D-47EF-8D4F-8498CE769F09}" type="datetimeFigureOut">
               <a:rPr lang="pt-BR" smtClean="0"/>
-              <a:t>07/04/2025</a:t>
+              <a:t>08/04/2025</a:t>
             </a:fld>
             <a:endParaRPr lang="pt-BR"/>
           </a:p>
@@ -1401,7 +1406,7 @@
           <a:p>
             <a:fld id="{15FCE9AC-568D-47EF-8D4F-8498CE769F09}" type="datetimeFigureOut">
               <a:rPr lang="pt-BR" smtClean="0"/>
-              <a:t>07/04/2025</a:t>
+              <a:t>08/04/2025</a:t>
             </a:fld>
             <a:endParaRPr lang="pt-BR"/>
           </a:p>
@@ -1813,7 +1818,7 @@
           <a:p>
             <a:fld id="{15FCE9AC-568D-47EF-8D4F-8498CE769F09}" type="datetimeFigureOut">
               <a:rPr lang="pt-BR" smtClean="0"/>
-              <a:t>07/04/2025</a:t>
+              <a:t>08/04/2025</a:t>
             </a:fld>
             <a:endParaRPr lang="pt-BR"/>
           </a:p>
@@ -1954,7 +1959,7 @@
           <a:p>
             <a:fld id="{15FCE9AC-568D-47EF-8D4F-8498CE769F09}" type="datetimeFigureOut">
               <a:rPr lang="pt-BR" smtClean="0"/>
-              <a:t>07/04/2025</a:t>
+              <a:t>08/04/2025</a:t>
             </a:fld>
             <a:endParaRPr lang="pt-BR"/>
           </a:p>
@@ -2067,7 +2072,7 @@
           <a:p>
             <a:fld id="{15FCE9AC-568D-47EF-8D4F-8498CE769F09}" type="datetimeFigureOut">
               <a:rPr lang="pt-BR" smtClean="0"/>
-              <a:t>07/04/2025</a:t>
+              <a:t>08/04/2025</a:t>
             </a:fld>
             <a:endParaRPr lang="pt-BR"/>
           </a:p>
@@ -2378,7 +2383,7 @@
           <a:p>
             <a:fld id="{15FCE9AC-568D-47EF-8D4F-8498CE769F09}" type="datetimeFigureOut">
               <a:rPr lang="pt-BR" smtClean="0"/>
-              <a:t>07/04/2025</a:t>
+              <a:t>08/04/2025</a:t>
             </a:fld>
             <a:endParaRPr lang="pt-BR"/>
           </a:p>
@@ -2666,7 +2671,7 @@
           <a:p>
             <a:fld id="{15FCE9AC-568D-47EF-8D4F-8498CE769F09}" type="datetimeFigureOut">
               <a:rPr lang="pt-BR" smtClean="0"/>
-              <a:t>07/04/2025</a:t>
+              <a:t>08/04/2025</a:t>
             </a:fld>
             <a:endParaRPr lang="pt-BR"/>
           </a:p>
@@ -2907,7 +2912,7 @@
           <a:p>
             <a:fld id="{15FCE9AC-568D-47EF-8D4F-8498CE769F09}" type="datetimeFigureOut">
               <a:rPr lang="pt-BR" smtClean="0"/>
-              <a:t>07/04/2025</a:t>
+              <a:t>08/04/2025</a:t>
             </a:fld>
             <a:endParaRPr lang="pt-BR"/>
           </a:p>
@@ -3324,6 +3329,42 @@
           <a:chExt cx="0" cy="0"/>
         </a:xfrm>
       </p:grpSpPr>
+      <p:pic>
+        <p:nvPicPr>
+          <p:cNvPr id="4" name="Imagem 3">
+            <a:extLst>
+              <a:ext uri="{FF2B5EF4-FFF2-40B4-BE49-F238E27FC236}">
+                <a16:creationId xmlns:a16="http://schemas.microsoft.com/office/drawing/2014/main" id="{7DF7BD9B-1369-47D0-B141-C15168A643EC}"/>
+              </a:ext>
+            </a:extLst>
+          </p:cNvPr>
+          <p:cNvPicPr>
+            <a:picLocks noChangeAspect="1"/>
+          </p:cNvPicPr>
+          <p:nvPr/>
+        </p:nvPicPr>
+        <p:blipFill>
+          <a:blip r:embed="rId2">
+            <a:extLst>
+              <a:ext uri="{28A0092B-C50C-407E-A947-70E740481C1C}">
+                <a14:useLocalDpi xmlns:a14="http://schemas.microsoft.com/office/drawing/2010/main" val="0"/>
+              </a:ext>
+            </a:extLst>
+          </a:blip>
+          <a:stretch>
+            <a:fillRect/>
+          </a:stretch>
+        </p:blipFill>
+        <p:spPr>
+          <a:xfrm>
+            <a:off x="0" y="0"/>
+            <a:ext cx="12192000" cy="6858000"/>
+          </a:xfrm>
+          <a:prstGeom prst="rect">
+            <a:avLst/>
+          </a:prstGeom>
+        </p:spPr>
+      </p:pic>
       <p:sp>
         <p:nvSpPr>
           <p:cNvPr id="2" name="Título 1">
@@ -3353,8 +3394,14 @@
           <a:lstStyle/>
           <a:p>
             <a:r>
-              <a:rPr lang="pt-BR" sz="10000" dirty="0"/>
-              <a:t>Alterar para BRIDGE</a:t>
+              <a:rPr lang="pt-BR" sz="10000" dirty="0">
+                <a:solidFill>
+                  <a:schemeClr val="bg1"/>
+                </a:solidFill>
+                <a:latin typeface="Arial" panose="020B0604020202020204" pitchFamily="34" charset="0"/>
+                <a:cs typeface="Arial" panose="020B0604020202020204" pitchFamily="34" charset="0"/>
+              </a:rPr>
+              <a:t>Alterando NAT para BRIDGE</a:t>
             </a:r>
           </a:p>
         </p:txBody>
@@ -3520,8 +3567,8 @@
         </p:blipFill>
         <p:spPr>
           <a:xfrm>
-            <a:off x="0" y="340789"/>
-            <a:ext cx="4905375" cy="5774000"/>
+            <a:off x="0" y="268197"/>
+            <a:ext cx="5520267" cy="6114789"/>
           </a:xfrm>
           <a:prstGeom prst="rect">
             <a:avLst/>
@@ -3542,7 +3589,7 @@
         </p:nvSpPr>
         <p:spPr>
           <a:xfrm>
-            <a:off x="457201" y="2628900"/>
+            <a:off x="592668" y="2799603"/>
             <a:ext cx="323850" cy="704850"/>
           </a:xfrm>
           <a:prstGeom prst="downArrow">
@@ -3573,7 +3620,7 @@
           <a:lstStyle/>
           <a:p>
             <a:pPr algn="ctr"/>
-            <a:endParaRPr lang="pt-BR"/>
+            <a:endParaRPr lang="pt-BR" dirty="0"/>
           </a:p>
         </p:txBody>
       </p:sp>
@@ -3599,8 +3646,8 @@
         </p:blipFill>
         <p:spPr>
           <a:xfrm>
-            <a:off x="5819775" y="642853"/>
-            <a:ext cx="6030438" cy="5774000"/>
+            <a:off x="5906561" y="268197"/>
+            <a:ext cx="6183440" cy="6114789"/>
           </a:xfrm>
           <a:prstGeom prst="rect">
             <a:avLst/>
@@ -3621,7 +3668,7 @@
         </p:nvSpPr>
         <p:spPr>
           <a:xfrm>
-            <a:off x="5438775" y="2952750"/>
+            <a:off x="5525561" y="3057525"/>
             <a:ext cx="381000" cy="742950"/>
           </a:xfrm>
           <a:prstGeom prst="rightArrow">
@@ -3670,7 +3717,7 @@
         </p:nvSpPr>
         <p:spPr>
           <a:xfrm>
-            <a:off x="6867526" y="1428751"/>
+            <a:off x="7070726" y="1149351"/>
             <a:ext cx="266700" cy="638174"/>
           </a:xfrm>
           <a:prstGeom prst="downArrow">
